--- a/pptx-creation-plugin/examples/seminar-kanrikaikei/out/deck.pptx
+++ b/pptx-creation-plugin/examples/seminar-kanrikaikei/out/deck.pptx
@@ -842,7 +842,8 @@
           <a:p>
             <a:r>
               <a:rPr lang="en-US" dirty="0"/>
-              <a:t>1スライド1メッセージの見本。数字は概念例。決算を待つと打ち手が遅れる、を体感させる。</a:t>
+              <a:t>1スライド1メッセージの見本。数字は概念例。決算を待つと打ち手が遅れる、を体感させる。
+【分解】項目=1（結論文＋概念数字） ／ 関係1語=単一の主張 ／ 量=概念例と明示 ／ 主役=「半年遅い」 ／ 既知→未知=決算書は年1回（既知）→それでは遅い（未知）</a:t>
             </a:r>
             <a:endParaRPr lang="en-US" dirty="0"/>
           </a:p>
@@ -1106,7 +1107,8 @@
           <a:p>
             <a:r>
               <a:rPr lang="en-US" dirty="0"/>
-              <a:t>グラフはネイティブ(編集可)。6月の谷→8月V字。決算を待たない、を数字で示す。</a:t>
+              <a:t>グラフはネイティブ(編集可)。6月の谷→8月V字。決算を待たない、を数字で示す。
+【分解】項目=月次6点 ／ 関係1語=推移（6月の谷→8月回復） ／ 量=実数イメージ・比例が論点 ／ 主役=谷からの回復 ／ 既知→未知=年1回の決算（既知）→月次の視界（未知）</a:t>
             </a:r>
             <a:endParaRPr lang="en-US" dirty="0"/>
           </a:p>
